--- a/05_改修資料/KSM_AWS_MOD_proposal_001_新機能提案書_カスミAWS活用_ja.pptx
+++ b/05_改修資料/KSM_AWS_MOD_proposal_001_新機能提案書_カスミAWS活用_ja.pptx
@@ -16523,13 +16523,13 @@
 </file>
 
 <file path=customXml/itemProps1.xml><?xml version="1.0" encoding="utf-8"?>
-<ds:datastoreItem xmlns:ds="http://schemas.openxmlformats.org/officeDocument/2006/customXml" ds:itemID="{D1F18A69-596B-4E0B-9467-5957C764575E}"/>
+<ds:datastoreItem xmlns:ds="http://schemas.openxmlformats.org/officeDocument/2006/customXml" ds:itemID="{B950D37E-72ED-4278-9765-FDDE124BB7FC}"/>
 </file>
 
 <file path=customXml/itemProps2.xml><?xml version="1.0" encoding="utf-8"?>
-<ds:datastoreItem xmlns:ds="http://schemas.openxmlformats.org/officeDocument/2006/customXml" ds:itemID="{9DB473AA-8BE7-4694-987B-43A2BC53E8AD}"/>
+<ds:datastoreItem xmlns:ds="http://schemas.openxmlformats.org/officeDocument/2006/customXml" ds:itemID="{6528A552-4B79-4A74-A695-C0535339BABF}"/>
 </file>
 
 <file path=customXml/itemProps3.xml><?xml version="1.0" encoding="utf-8"?>
-<ds:datastoreItem xmlns:ds="http://schemas.openxmlformats.org/officeDocument/2006/customXml" ds:itemID="{B9519DD2-091C-490B-8D47-0DAF49CD0EDE}"/>
+<ds:datastoreItem xmlns:ds="http://schemas.openxmlformats.org/officeDocument/2006/customXml" ds:itemID="{DD3CDB1E-19F9-4AD8-B6F6-65DEE62DFB50}"/>
 </file>